--- a/Intern/16_CMAPSS_using_Transformer/Báo cáo kết quả chạy code.pptx
+++ b/Intern/16_CMAPSS_using_Transformer/Báo cáo kết quả chạy code.pptx
@@ -271,7 +271,7 @@
           <a:p>
             <a:fld id="{801DF5A0-0158-4E0E-BBDB-4D5610A0D6A1}" type="datetimeFigureOut">
               <a:rPr lang="vi-VN" smtClean="0"/>
-              <a:t>12/02/2025</a:t>
+              <a:t>17/02/2025</a:t>
             </a:fld>
             <a:endParaRPr lang="vi-VN"/>
           </a:p>
@@ -471,7 +471,7 @@
           <a:p>
             <a:fld id="{801DF5A0-0158-4E0E-BBDB-4D5610A0D6A1}" type="datetimeFigureOut">
               <a:rPr lang="vi-VN" smtClean="0"/>
-              <a:t>12/02/2025</a:t>
+              <a:t>17/02/2025</a:t>
             </a:fld>
             <a:endParaRPr lang="vi-VN"/>
           </a:p>
@@ -681,7 +681,7 @@
           <a:p>
             <a:fld id="{801DF5A0-0158-4E0E-BBDB-4D5610A0D6A1}" type="datetimeFigureOut">
               <a:rPr lang="vi-VN" smtClean="0"/>
-              <a:t>12/02/2025</a:t>
+              <a:t>17/02/2025</a:t>
             </a:fld>
             <a:endParaRPr lang="vi-VN"/>
           </a:p>
@@ -881,7 +881,7 @@
           <a:p>
             <a:fld id="{801DF5A0-0158-4E0E-BBDB-4D5610A0D6A1}" type="datetimeFigureOut">
               <a:rPr lang="vi-VN" smtClean="0"/>
-              <a:t>12/02/2025</a:t>
+              <a:t>17/02/2025</a:t>
             </a:fld>
             <a:endParaRPr lang="vi-VN"/>
           </a:p>
@@ -1157,7 +1157,7 @@
           <a:p>
             <a:fld id="{801DF5A0-0158-4E0E-BBDB-4D5610A0D6A1}" type="datetimeFigureOut">
               <a:rPr lang="vi-VN" smtClean="0"/>
-              <a:t>12/02/2025</a:t>
+              <a:t>17/02/2025</a:t>
             </a:fld>
             <a:endParaRPr lang="vi-VN"/>
           </a:p>
@@ -1425,7 +1425,7 @@
           <a:p>
             <a:fld id="{801DF5A0-0158-4E0E-BBDB-4D5610A0D6A1}" type="datetimeFigureOut">
               <a:rPr lang="vi-VN" smtClean="0"/>
-              <a:t>12/02/2025</a:t>
+              <a:t>17/02/2025</a:t>
             </a:fld>
             <a:endParaRPr lang="vi-VN"/>
           </a:p>
@@ -1840,7 +1840,7 @@
           <a:p>
             <a:fld id="{801DF5A0-0158-4E0E-BBDB-4D5610A0D6A1}" type="datetimeFigureOut">
               <a:rPr lang="vi-VN" smtClean="0"/>
-              <a:t>12/02/2025</a:t>
+              <a:t>17/02/2025</a:t>
             </a:fld>
             <a:endParaRPr lang="vi-VN"/>
           </a:p>
@@ -1982,7 +1982,7 @@
           <a:p>
             <a:fld id="{801DF5A0-0158-4E0E-BBDB-4D5610A0D6A1}" type="datetimeFigureOut">
               <a:rPr lang="vi-VN" smtClean="0"/>
-              <a:t>12/02/2025</a:t>
+              <a:t>17/02/2025</a:t>
             </a:fld>
             <a:endParaRPr lang="vi-VN"/>
           </a:p>
@@ -2095,7 +2095,7 @@
           <a:p>
             <a:fld id="{801DF5A0-0158-4E0E-BBDB-4D5610A0D6A1}" type="datetimeFigureOut">
               <a:rPr lang="vi-VN" smtClean="0"/>
-              <a:t>12/02/2025</a:t>
+              <a:t>17/02/2025</a:t>
             </a:fld>
             <a:endParaRPr lang="vi-VN"/>
           </a:p>
@@ -2408,7 +2408,7 @@
           <a:p>
             <a:fld id="{801DF5A0-0158-4E0E-BBDB-4D5610A0D6A1}" type="datetimeFigureOut">
               <a:rPr lang="vi-VN" smtClean="0"/>
-              <a:t>12/02/2025</a:t>
+              <a:t>17/02/2025</a:t>
             </a:fld>
             <a:endParaRPr lang="vi-VN"/>
           </a:p>
@@ -2697,7 +2697,7 @@
           <a:p>
             <a:fld id="{801DF5A0-0158-4E0E-BBDB-4D5610A0D6A1}" type="datetimeFigureOut">
               <a:rPr lang="vi-VN" smtClean="0"/>
-              <a:t>12/02/2025</a:t>
+              <a:t>17/02/2025</a:t>
             </a:fld>
             <a:endParaRPr lang="vi-VN"/>
           </a:p>
@@ -2940,7 +2940,7 @@
           <a:p>
             <a:fld id="{801DF5A0-0158-4E0E-BBDB-4D5610A0D6A1}" type="datetimeFigureOut">
               <a:rPr lang="vi-VN" smtClean="0"/>
-              <a:t>12/02/2025</a:t>
+              <a:t>17/02/2025</a:t>
             </a:fld>
             <a:endParaRPr lang="vi-VN"/>
           </a:p>
@@ -4534,47 +4534,12 @@
           <a:chExt cx="0" cy="0"/>
         </a:xfrm>
       </p:grpSpPr>
-      <p:sp>
-        <p:nvSpPr>
-          <p:cNvPr id="2" name="TextBox 1">
-            <a:extLst>
-              <a:ext uri="{FF2B5EF4-FFF2-40B4-BE49-F238E27FC236}">
-                <a16:creationId xmlns:a16="http://schemas.microsoft.com/office/drawing/2014/main" id="{4BD8E2C3-CC7A-52B3-B100-6FD4805EC705}"/>
-              </a:ext>
-            </a:extLst>
-          </p:cNvPr>
-          <p:cNvSpPr txBox="1"/>
-          <p:nvPr/>
-        </p:nvSpPr>
-        <p:spPr>
-          <a:xfrm>
-            <a:off x="3359602" y="0"/>
-            <a:ext cx="6559296" cy="523220"/>
-          </a:xfrm>
-          <a:prstGeom prst="rect">
-            <a:avLst/>
-          </a:prstGeom>
-          <a:noFill/>
-        </p:spPr>
-        <p:txBody>
-          <a:bodyPr wrap="none" rtlCol="0">
-            <a:spAutoFit/>
-          </a:bodyPr>
-          <a:lstStyle/>
-          <a:p>
-            <a:r>
-              <a:rPr lang="vi-VN" sz="2800" b="1"/>
-              <a:t>Áp dụng XAI – Biểu đồ Attention map</a:t>
-            </a:r>
-          </a:p>
-        </p:txBody>
-      </p:sp>
       <p:pic>
         <p:nvPicPr>
-          <p:cNvPr id="4" name="Picture 3">
-            <a:extLst>
-              <a:ext uri="{FF2B5EF4-FFF2-40B4-BE49-F238E27FC236}">
-                <a16:creationId xmlns:a16="http://schemas.microsoft.com/office/drawing/2014/main" id="{39A03FD6-A45F-F9B1-EF6E-21ACB5F2F6B2}"/>
+          <p:cNvPr id="8" name="Picture 7">
+            <a:extLst>
+              <a:ext uri="{FF2B5EF4-FFF2-40B4-BE49-F238E27FC236}">
+                <a16:creationId xmlns:a16="http://schemas.microsoft.com/office/drawing/2014/main" id="{C6896EC7-1D3C-37E9-DF63-FB45457719DF}"/>
               </a:ext>
             </a:extLst>
           </p:cNvPr>
@@ -4591,20 +4556,55 @@
         </p:blipFill>
         <p:spPr>
           <a:xfrm>
-            <a:off x="0" y="528959"/>
-            <a:ext cx="12192000" cy="2377727"/>
+            <a:off x="0" y="2820442"/>
+            <a:ext cx="12192000" cy="2390588"/>
           </a:xfrm>
           <a:prstGeom prst="rect">
             <a:avLst/>
           </a:prstGeom>
         </p:spPr>
       </p:pic>
+      <p:sp>
+        <p:nvSpPr>
+          <p:cNvPr id="2" name="TextBox 1">
+            <a:extLst>
+              <a:ext uri="{FF2B5EF4-FFF2-40B4-BE49-F238E27FC236}">
+                <a16:creationId xmlns:a16="http://schemas.microsoft.com/office/drawing/2014/main" id="{4BD8E2C3-CC7A-52B3-B100-6FD4805EC705}"/>
+              </a:ext>
+            </a:extLst>
+          </p:cNvPr>
+          <p:cNvSpPr txBox="1"/>
+          <p:nvPr/>
+        </p:nvSpPr>
+        <p:spPr>
+          <a:xfrm>
+            <a:off x="3359602" y="0"/>
+            <a:ext cx="6559296" cy="523220"/>
+          </a:xfrm>
+          <a:prstGeom prst="rect">
+            <a:avLst/>
+          </a:prstGeom>
+          <a:noFill/>
+        </p:spPr>
+        <p:txBody>
+          <a:bodyPr wrap="none" rtlCol="0">
+            <a:spAutoFit/>
+          </a:bodyPr>
+          <a:lstStyle/>
+          <a:p>
+            <a:r>
+              <a:rPr lang="vi-VN" sz="2800" b="1"/>
+              <a:t>Áp dụng XAI – Biểu đồ Attention map</a:t>
+            </a:r>
+          </a:p>
+        </p:txBody>
+      </p:sp>
       <p:pic>
         <p:nvPicPr>
-          <p:cNvPr id="8" name="Picture 7">
-            <a:extLst>
-              <a:ext uri="{FF2B5EF4-FFF2-40B4-BE49-F238E27FC236}">
-                <a16:creationId xmlns:a16="http://schemas.microsoft.com/office/drawing/2014/main" id="{C6896EC7-1D3C-37E9-DF63-FB45457719DF}"/>
+          <p:cNvPr id="4" name="Picture 3">
+            <a:extLst>
+              <a:ext uri="{FF2B5EF4-FFF2-40B4-BE49-F238E27FC236}">
+                <a16:creationId xmlns:a16="http://schemas.microsoft.com/office/drawing/2014/main" id="{39A03FD6-A45F-F9B1-EF6E-21ACB5F2F6B2}"/>
               </a:ext>
             </a:extLst>
           </p:cNvPr>
@@ -4621,8 +4621,8 @@
         </p:blipFill>
         <p:spPr>
           <a:xfrm>
-            <a:off x="0" y="2754453"/>
-            <a:ext cx="12192000" cy="2390588"/>
+            <a:off x="0" y="528959"/>
+            <a:ext cx="12192000" cy="2377727"/>
           </a:xfrm>
           <a:prstGeom prst="rect">
             <a:avLst/>
@@ -5275,7 +5275,15 @@
             </a:pPr>
             <a:r>
               <a:rPr lang="en-US" sz="2000"/>
-              <a:t>         =&gt; Tìm hiểu các đặc trưng ảnh hưởng như thế nào để kết quả đầu ra của mô hình</a:t>
+              <a:t>         =&gt; Tìm hiểu các đặc trưng ảnh hưởng như thế nào </a:t>
+            </a:r>
+            <a:r>
+              <a:rPr lang="vi-VN" sz="2000"/>
+              <a:t>đến</a:t>
+            </a:r>
+            <a:r>
+              <a:rPr lang="en-US" sz="2000"/>
+              <a:t> kết quả đầu ra của mô hình</a:t>
             </a:r>
           </a:p>
           <a:p>
@@ -5751,8 +5759,8 @@
         </p:nvSpPr>
         <p:spPr>
           <a:xfrm>
-            <a:off x="441434" y="2664162"/>
-            <a:ext cx="6243145" cy="3544614"/>
+            <a:off x="300032" y="2615512"/>
+            <a:ext cx="6392999" cy="3544614"/>
           </a:xfrm>
           <a:prstGeom prst="rect">
             <a:avLst/>
@@ -5822,7 +5830,7 @@
             </a:pPr>
             <a:r>
               <a:rPr lang="en-US" sz="2000"/>
-              <a:t>Tập RUL</a:t>
+              <a:t>Tập RUL_FD001, RUL_FD002, RUL_FD003, RUL_FD004</a:t>
             </a:r>
           </a:p>
           <a:p>
